--- a/林子瑜-LLM_ETF_修訂五版_v20260609.pptx
+++ b/林子瑜-LLM_ETF_修訂五版_v20260609.pptx
@@ -5,7 +5,7 @@
     <p:sldMasterId id="2147483659" r:id="rId1"/>
   </p:sldMasterIdLst>
   <p:notesMasterIdLst>
-    <p:notesMasterId r:id="rId30"/>
+    <p:notesMasterId r:id="rId29"/>
   </p:notesMasterIdLst>
   <p:sldIdLst>
     <p:sldId id="256" r:id="rId2"/>
@@ -34,30 +34,29 @@
     <p:sldId id="270" r:id="rId25"/>
     <p:sldId id="272" r:id="rId26"/>
     <p:sldId id="273" r:id="rId27"/>
-    <p:sldId id="274" r:id="rId28"/>
-    <p:sldId id="275" r:id="rId29"/>
+    <p:sldId id="275" r:id="rId28"/>
   </p:sldIdLst>
   <p:sldSz cx="12192000" cy="6858000"/>
   <p:notesSz cx="6858000" cy="9144000"/>
   <p:embeddedFontLst>
     <p:embeddedFont>
       <p:font typeface="Amasis MT Pro Medium" panose="02040604050005020304" pitchFamily="18" charset="0"/>
-      <p:regular r:id="rId31"/>
-      <p:italic r:id="rId32"/>
+      <p:regular r:id="rId30"/>
+      <p:italic r:id="rId31"/>
     </p:embeddedFont>
     <p:embeddedFont>
       <p:font typeface="DM Sans" pitchFamily="2" charset="0"/>
-      <p:regular r:id="rId33"/>
-      <p:bold r:id="rId34"/>
-      <p:italic r:id="rId35"/>
-      <p:boldItalic r:id="rId36"/>
+      <p:regular r:id="rId32"/>
+      <p:bold r:id="rId33"/>
+      <p:italic r:id="rId34"/>
+      <p:boldItalic r:id="rId35"/>
     </p:embeddedFont>
     <p:embeddedFont>
       <p:font typeface="Merriweather" panose="00000500000000000000" pitchFamily="2" charset="0"/>
-      <p:regular r:id="rId37"/>
-      <p:bold r:id="rId38"/>
-      <p:italic r:id="rId39"/>
-      <p:boldItalic r:id="rId40"/>
+      <p:regular r:id="rId36"/>
+      <p:bold r:id="rId37"/>
+      <p:italic r:id="rId38"/>
+      <p:boldItalic r:id="rId39"/>
     </p:embeddedFont>
   </p:embeddedFontLst>
   <p:defaultTextStyle>
@@ -3905,121 +3904,6 @@
 </file>
 
 <file path=ppt/notesSlides/notesSlide27.xml><?xml version="1.0" encoding="utf-8"?>
-<p:notes xmlns:a="http://schemas.openxmlformats.org/drawingml/2006/main" xmlns:r="http://schemas.openxmlformats.org/officeDocument/2006/relationships" xmlns:p="http://schemas.openxmlformats.org/presentationml/2006/main" showMasterSp="0" showMasterPhAnim="0">
-  <p:cSld>
-    <p:spTree>
-      <p:nvGrpSpPr>
-        <p:cNvPr id="1" name="Shape 385"/>
-        <p:cNvGrpSpPr/>
-        <p:nvPr/>
-      </p:nvGrpSpPr>
-      <p:grpSpPr>
-        <a:xfrm>
-          <a:off x="0" y="0"/>
-          <a:ext cx="0" cy="0"/>
-          <a:chOff x="0" y="0"/>
-          <a:chExt cx="0" cy="0"/>
-        </a:xfrm>
-      </p:grpSpPr>
-      <p:sp>
-        <p:nvSpPr>
-          <p:cNvPr id="386" name="Google Shape;386;p19:notes"/>
-          <p:cNvSpPr txBox="1">
-            <a:spLocks noGrp="1"/>
-          </p:cNvSpPr>
-          <p:nvPr>
-            <p:ph type="body" idx="1"/>
-          </p:nvPr>
-        </p:nvSpPr>
-        <p:spPr>
-          <a:xfrm>
-            <a:off x="685800" y="4343400"/>
-            <a:ext cx="5486400" cy="4114800"/>
-          </a:xfrm>
-          <a:prstGeom prst="rect">
-            <a:avLst/>
-          </a:prstGeom>
-        </p:spPr>
-        <p:txBody>
-          <a:bodyPr spcFirstLastPara="1" wrap="square" lIns="91425" tIns="91425" rIns="91425" bIns="91425" anchor="t" anchorCtr="0">
-            <a:noAutofit/>
-          </a:bodyPr>
-          <a:lstStyle/>
-          <a:p>
-            <a:pPr marL="0" lvl="0" indent="0" algn="l" rtl="0">
-              <a:spcBef>
-                <a:spcPts val="0"/>
-              </a:spcBef>
-              <a:spcAft>
-                <a:spcPts val="0"/>
-              </a:spcAft>
-              <a:buNone/>
-            </a:pPr>
-            <a:r>
-              <a:rPr lang="zh-TW" altLang="zh-TW" dirty="0"/>
-              <a:t>綜合發現有三點：沒有單一冠軍模型，不同市場最佳模型不同；迴歸顯示次日走勢本質難預測；所以 LLM 定位在解釋型輔助，而不是當主要算力引擎。</a:t>
-            </a:r>
-            <a:endParaRPr dirty="0"/>
-          </a:p>
-        </p:txBody>
-      </p:sp>
-      <p:sp>
-        <p:nvSpPr>
-          <p:cNvPr id="387" name="Google Shape;387;p19:notes"/>
-          <p:cNvSpPr>
-            <a:spLocks noGrp="1" noRot="1" noChangeAspect="1"/>
-          </p:cNvSpPr>
-          <p:nvPr>
-            <p:ph type="sldImg" idx="2"/>
-          </p:nvPr>
-        </p:nvSpPr>
-        <p:spPr>
-          <a:xfrm>
-            <a:off x="381000" y="685800"/>
-            <a:ext cx="6096000" cy="3429000"/>
-          </a:xfrm>
-          <a:custGeom>
-            <a:avLst/>
-            <a:gdLst/>
-            <a:ahLst/>
-            <a:cxnLst/>
-            <a:rect l="l" t="t" r="r" b="b"/>
-            <a:pathLst>
-              <a:path w="120000" h="120000" extrusionOk="0">
-                <a:moveTo>
-                  <a:pt x="0" y="0"/>
-                </a:moveTo>
-                <a:lnTo>
-                  <a:pt x="120000" y="0"/>
-                </a:lnTo>
-                <a:lnTo>
-                  <a:pt x="120000" y="120000"/>
-                </a:lnTo>
-                <a:lnTo>
-                  <a:pt x="0" y="120000"/>
-                </a:lnTo>
-                <a:close/>
-              </a:path>
-            </a:pathLst>
-          </a:custGeom>
-        </p:spPr>
-        <p:txBody>
-          <a:bodyPr/>
-          <a:lstStyle/>
-          <a:p>
-            <a:endParaRPr lang="zh-TW" altLang="en-US"/>
-          </a:p>
-        </p:txBody>
-      </p:sp>
-    </p:spTree>
-  </p:cSld>
-  <p:clrMapOvr>
-    <a:masterClrMapping/>
-  </p:clrMapOvr>
-</p:notes>
-</file>
-
-<file path=ppt/notesSlides/notesSlide28.xml><?xml version="1.0" encoding="utf-8"?>
 <p:notes xmlns:a="http://schemas.openxmlformats.org/drawingml/2006/main" xmlns:r="http://schemas.openxmlformats.org/officeDocument/2006/relationships" xmlns:p="http://schemas.openxmlformats.org/presentationml/2006/main" showMasterSp="0" showMasterPhAnim="0">
   <p:cSld>
     <p:spTree>
@@ -30450,6 +30334,53 @@
           <a:chExt cx="0" cy="0"/>
         </a:xfrm>
       </p:grpSpPr>
+      <p:sp>
+        <p:nvSpPr>
+          <p:cNvPr id="7" name="矩形: 圓角 6">
+            <a:extLst>
+              <a:ext uri="{FF2B5EF4-FFF2-40B4-BE49-F238E27FC236}">
+                <a16:creationId xmlns:a16="http://schemas.microsoft.com/office/drawing/2014/main" id="{BF5115FE-9D54-E5EC-9285-4BA8549019AC}"/>
+              </a:ext>
+            </a:extLst>
+          </p:cNvPr>
+          <p:cNvSpPr/>
+          <p:nvPr/>
+        </p:nvSpPr>
+        <p:spPr>
+          <a:xfrm>
+            <a:off x="2042159" y="5091753"/>
+            <a:ext cx="8107681" cy="1432560"/>
+          </a:xfrm>
+          <a:prstGeom prst="roundRect">
+            <a:avLst/>
+          </a:prstGeom>
+          <a:effectLst/>
+        </p:spPr>
+        <p:style>
+          <a:lnRef idx="2">
+            <a:schemeClr val="accent1">
+              <a:shade val="15000"/>
+            </a:schemeClr>
+          </a:lnRef>
+          <a:fillRef idx="1001">
+            <a:schemeClr val="dk2"/>
+          </a:fillRef>
+          <a:effectRef idx="0">
+            <a:schemeClr val="accent1"/>
+          </a:effectRef>
+          <a:fontRef idx="minor">
+            <a:schemeClr val="lt1"/>
+          </a:fontRef>
+        </p:style>
+        <p:txBody>
+          <a:bodyPr rtlCol="0" anchor="ctr"/>
+          <a:lstStyle/>
+          <a:p>
+            <a:pPr algn="ctr"/>
+            <a:endParaRPr lang="zh-TW" altLang="en-US"/>
+          </a:p>
+        </p:txBody>
+      </p:sp>
       <p:pic>
         <p:nvPicPr>
           <p:cNvPr id="377" name="Google Shape;377;p30" descr="image.png"/>
@@ -30465,8 +30396,8 @@
         </p:blipFill>
         <p:spPr>
           <a:xfrm>
-            <a:off x="571500" y="2553870"/>
-            <a:ext cx="5334000" cy="3968850"/>
+            <a:off x="571500" y="2043999"/>
+            <a:ext cx="5334000" cy="2858371"/>
           </a:xfrm>
           <a:prstGeom prst="rect">
             <a:avLst/>
@@ -30492,8 +30423,8 @@
         </p:blipFill>
         <p:spPr>
           <a:xfrm>
-            <a:off x="6286500" y="2553870"/>
-            <a:ext cx="5334000" cy="3968849"/>
+            <a:off x="6286500" y="2043999"/>
+            <a:ext cx="5334000" cy="2858371"/>
           </a:xfrm>
           <a:prstGeom prst="rect">
             <a:avLst/>
@@ -30512,7 +30443,7 @@
         </p:nvSpPr>
         <p:spPr>
           <a:xfrm>
-            <a:off x="866775" y="2984105"/>
+            <a:off x="866775" y="2338921"/>
             <a:ext cx="4980622" cy="369332"/>
           </a:xfrm>
           <a:prstGeom prst="rect">
@@ -30586,8 +30517,8 @@
         </p:nvSpPr>
         <p:spPr>
           <a:xfrm>
-            <a:off x="866775" y="3504564"/>
-            <a:ext cx="4743450" cy="2659190"/>
+            <a:off x="866775" y="2879292"/>
+            <a:ext cx="4743450" cy="1661993"/>
           </a:xfrm>
           <a:prstGeom prst="rect">
             <a:avLst/>
@@ -30604,9 +30535,6 @@
           <a:lstStyle/>
           <a:p>
             <a:pPr marL="285750" marR="0" lvl="0" indent="-285750" algn="l" rtl="0">
-              <a:lnSpc>
-                <a:spcPct val="160000"/>
-              </a:lnSpc>
               <a:spcBef>
                 <a:spcPts val="0"/>
               </a:spcBef>
@@ -30664,9 +30592,6 @@
           </a:p>
           <a:p>
             <a:pPr marL="285750" marR="0" lvl="0" indent="-285750" algn="l" rtl="0">
-              <a:lnSpc>
-                <a:spcPct val="160000"/>
-              </a:lnSpc>
               <a:spcBef>
                 <a:spcPts val="0"/>
               </a:spcBef>
@@ -30727,9 +30652,6 @@
           </a:p>
           <a:p>
             <a:pPr marL="285750" marR="0" lvl="0" indent="-285750" algn="l" rtl="0">
-              <a:lnSpc>
-                <a:spcPct val="160000"/>
-              </a:lnSpc>
               <a:spcBef>
                 <a:spcPts val="0"/>
               </a:spcBef>
@@ -30811,9 +30733,6 @@
           </a:p>
           <a:p>
             <a:pPr marL="285750" marR="0" lvl="0" indent="-285750" algn="l" rtl="0">
-              <a:lnSpc>
-                <a:spcPct val="160000"/>
-              </a:lnSpc>
               <a:spcBef>
                 <a:spcPts val="0"/>
               </a:spcBef>
@@ -30847,9 +30766,6 @@
           </a:p>
           <a:p>
             <a:pPr marL="285750" marR="0" lvl="0" indent="-285750" algn="l" rtl="0">
-              <a:lnSpc>
-                <a:spcPct val="160000"/>
-              </a:lnSpc>
               <a:spcBef>
                 <a:spcPts val="0"/>
               </a:spcBef>
@@ -30898,9 +30814,6 @@
           </a:p>
           <a:p>
             <a:pPr marR="0" lvl="0" algn="l" rtl="0">
-              <a:lnSpc>
-                <a:spcPct val="160000"/>
-              </a:lnSpc>
               <a:spcBef>
                 <a:spcPts val="0"/>
               </a:spcBef>
@@ -30948,7 +30861,7 @@
         </p:nvSpPr>
         <p:spPr>
           <a:xfrm>
-            <a:off x="6581775" y="2980793"/>
+            <a:off x="6581775" y="2343239"/>
             <a:ext cx="4980622" cy="369332"/>
           </a:xfrm>
           <a:prstGeom prst="rect">
@@ -30998,8 +30911,8 @@
         </p:nvSpPr>
         <p:spPr>
           <a:xfrm>
-            <a:off x="6581775" y="3606827"/>
-            <a:ext cx="4743450" cy="2659190"/>
+            <a:off x="6581775" y="2879292"/>
+            <a:ext cx="4743450" cy="1661993"/>
           </a:xfrm>
           <a:prstGeom prst="rect">
             <a:avLst/>
@@ -31016,9 +30929,6 @@
           <a:lstStyle/>
           <a:p>
             <a:pPr marL="285750" marR="0" lvl="0" indent="-285750" algn="l" rtl="0">
-              <a:lnSpc>
-                <a:spcPct val="160000"/>
-              </a:lnSpc>
               <a:spcBef>
                 <a:spcPts val="0"/>
               </a:spcBef>
@@ -31052,9 +30962,6 @@
           </a:p>
           <a:p>
             <a:pPr marL="285750" marR="0" lvl="0" indent="-285750" algn="l" rtl="0">
-              <a:lnSpc>
-                <a:spcPct val="160000"/>
-              </a:lnSpc>
               <a:spcBef>
                 <a:spcPts val="0"/>
               </a:spcBef>
@@ -31103,9 +31010,6 @@
           </a:p>
           <a:p>
             <a:pPr marL="285750" marR="0" lvl="0" indent="-285750" algn="l" rtl="0">
-              <a:lnSpc>
-                <a:spcPct val="160000"/>
-              </a:lnSpc>
               <a:spcBef>
                 <a:spcPts val="0"/>
               </a:spcBef>
@@ -31163,9 +31067,6 @@
           </a:p>
           <a:p>
             <a:pPr marL="285750" marR="0" lvl="0" indent="-285750" algn="l" rtl="0">
-              <a:lnSpc>
-                <a:spcPct val="160000"/>
-              </a:lnSpc>
               <a:spcBef>
                 <a:spcPts val="0"/>
               </a:spcBef>
@@ -31226,9 +31127,6 @@
           </a:p>
           <a:p>
             <a:pPr marR="0" lvl="0" algn="l" rtl="0">
-              <a:lnSpc>
-                <a:spcPct val="160000"/>
-              </a:lnSpc>
               <a:spcBef>
                 <a:spcPts val="0"/>
               </a:spcBef>
@@ -31276,7 +31174,7 @@
         </p:nvSpPr>
         <p:spPr>
           <a:xfrm>
-            <a:off x="809625" y="919311"/>
+            <a:off x="840582" y="963495"/>
             <a:ext cx="11351418" cy="609398"/>
           </a:xfrm>
           <a:prstGeom prst="rect">
@@ -31428,157 +31326,22 @@
           </a:p>
         </p:txBody>
       </p:sp>
-    </p:spTree>
-  </p:cSld>
-  <p:clrMapOvr>
-    <a:masterClrMapping/>
-  </p:clrMapOvr>
-</p:sld>
-</file>
-
-<file path=ppt/slides/slide27.xml><?xml version="1.0" encoding="utf-8"?>
-<p:sld xmlns:a="http://schemas.openxmlformats.org/drawingml/2006/main" xmlns:r="http://schemas.openxmlformats.org/officeDocument/2006/relationships" xmlns:p="http://schemas.openxmlformats.org/presentationml/2006/main">
-  <p:cSld>
-    <p:bg>
-      <p:bgPr>
-        <a:solidFill>
-          <a:srgbClr val="FFFFFF"/>
-        </a:solidFill>
-        <a:effectLst/>
-      </p:bgPr>
-    </p:bg>
-    <p:spTree>
-      <p:nvGrpSpPr>
-        <p:cNvPr id="1" name="Shape 388"/>
-        <p:cNvGrpSpPr/>
-        <p:nvPr/>
-      </p:nvGrpSpPr>
-      <p:grpSpPr>
-        <a:xfrm>
-          <a:off x="0" y="0"/>
-          <a:ext cx="0" cy="0"/>
-          <a:chOff x="0" y="0"/>
-          <a:chExt cx="0" cy="0"/>
-        </a:xfrm>
-      </p:grpSpPr>
-      <p:pic>
-        <p:nvPicPr>
-          <p:cNvPr id="390" name="Google Shape;390;p31" descr="image.png"/>
-          <p:cNvPicPr preferRelativeResize="0"/>
-          <p:nvPr/>
-        </p:nvPicPr>
-        <p:blipFill rotWithShape="1">
-          <a:blip r:embed="rId3">
-            <a:alphaModFix/>
-          </a:blip>
-          <a:srcRect/>
-          <a:stretch/>
-        </p:blipFill>
-        <p:spPr>
-          <a:xfrm>
-            <a:off x="571500" y="2743200"/>
-            <a:ext cx="3524250" cy="2662989"/>
-          </a:xfrm>
-          <a:prstGeom prst="rect">
-            <a:avLst/>
-          </a:prstGeom>
-          <a:noFill/>
-          <a:ln>
-            <a:noFill/>
-          </a:ln>
-        </p:spPr>
-      </p:pic>
-      <p:pic>
-        <p:nvPicPr>
-          <p:cNvPr id="391" name="Google Shape;391;p31" descr="image.png"/>
-          <p:cNvPicPr preferRelativeResize="0"/>
-          <p:nvPr/>
-        </p:nvPicPr>
-        <p:blipFill rotWithShape="1">
-          <a:blip r:embed="rId3">
-            <a:alphaModFix/>
-          </a:blip>
-          <a:srcRect/>
-          <a:stretch/>
-        </p:blipFill>
-        <p:spPr>
-          <a:xfrm>
-            <a:off x="4333875" y="2743200"/>
-            <a:ext cx="3524250" cy="2662989"/>
-          </a:xfrm>
-          <a:prstGeom prst="rect">
-            <a:avLst/>
-          </a:prstGeom>
-          <a:noFill/>
-          <a:ln>
-            <a:noFill/>
-          </a:ln>
-        </p:spPr>
-      </p:pic>
-      <p:pic>
-        <p:nvPicPr>
-          <p:cNvPr id="392" name="Google Shape;392;p31" descr="image.png"/>
-          <p:cNvPicPr preferRelativeResize="0"/>
-          <p:nvPr/>
-        </p:nvPicPr>
-        <p:blipFill rotWithShape="1">
-          <a:blip r:embed="rId4">
-            <a:alphaModFix/>
-          </a:blip>
-          <a:srcRect/>
-          <a:stretch/>
-        </p:blipFill>
-        <p:spPr>
-          <a:xfrm>
-            <a:off x="8058149" y="2743200"/>
-            <a:ext cx="3524250" cy="2662989"/>
-          </a:xfrm>
-          <a:prstGeom prst="rect">
-            <a:avLst/>
-          </a:prstGeom>
-          <a:noFill/>
-          <a:ln>
-            <a:noFill/>
-          </a:ln>
-        </p:spPr>
-      </p:pic>
-      <p:pic>
-        <p:nvPicPr>
-          <p:cNvPr id="393" name="Google Shape;393;p31" descr="image.png"/>
-          <p:cNvPicPr preferRelativeResize="0"/>
-          <p:nvPr/>
-        </p:nvPicPr>
-        <p:blipFill rotWithShape="1">
-          <a:blip r:embed="rId5">
-            <a:alphaModFix/>
-          </a:blip>
-          <a:srcRect/>
-          <a:stretch/>
-        </p:blipFill>
-        <p:spPr>
-          <a:xfrm>
-            <a:off x="2095500" y="3194090"/>
-            <a:ext cx="428625" cy="381000"/>
-          </a:xfrm>
-          <a:prstGeom prst="rect">
-            <a:avLst/>
-          </a:prstGeom>
-          <a:noFill/>
-          <a:ln>
-            <a:noFill/>
-          </a:ln>
-        </p:spPr>
-      </p:pic>
       <p:sp>
         <p:nvSpPr>
-          <p:cNvPr id="394" name="Google Shape;394;p31"/>
+          <p:cNvPr id="5" name="Google Shape;394;p31">
+            <a:extLst>
+              <a:ext uri="{FF2B5EF4-FFF2-40B4-BE49-F238E27FC236}">
+                <a16:creationId xmlns:a16="http://schemas.microsoft.com/office/drawing/2014/main" id="{10A165C8-523F-9F85-F109-0B1D232994CC}"/>
+              </a:ext>
+            </a:extLst>
+          </p:cNvPr>
           <p:cNvSpPr txBox="1"/>
           <p:nvPr/>
         </p:nvSpPr>
         <p:spPr>
           <a:xfrm>
-            <a:off x="809625" y="3884850"/>
-            <a:ext cx="3100387" cy="369332"/>
+            <a:off x="2270761" y="5175935"/>
+            <a:ext cx="7879080" cy="1138773"/>
           </a:xfrm>
           <a:prstGeom prst="rect">
             <a:avLst/>
@@ -31594,529 +31357,67 @@
           </a:bodyPr>
           <a:lstStyle/>
           <a:p>
-            <a:pPr marL="0" marR="0" lvl="0" indent="0" algn="ctr" rtl="0">
-              <a:spcBef>
-                <a:spcPts val="0"/>
-              </a:spcBef>
-              <a:spcAft>
-                <a:spcPts val="0"/>
-              </a:spcAft>
-              <a:buNone/>
-            </a:pPr>
-            <a:r>
-              <a:rPr lang="en-US" sz="2400" b="1" i="0" u="none" strike="noStrike" cap="none" dirty="0" err="1">
-                <a:solidFill>
-                  <a:srgbClr val="FFFFFF"/>
-                </a:solidFill>
-                <a:latin typeface="DM Sans"/>
-                <a:ea typeface="DM Sans"/>
-                <a:cs typeface="DM Sans"/>
-                <a:sym typeface="DM Sans"/>
-              </a:rPr>
-              <a:t>無單一冠軍</a:t>
-            </a:r>
-            <a:endParaRPr sz="2400" dirty="0"/>
-          </a:p>
-        </p:txBody>
-      </p:sp>
-      <p:sp>
-        <p:nvSpPr>
-          <p:cNvPr id="395" name="Google Shape;395;p31"/>
-          <p:cNvSpPr txBox="1"/>
-          <p:nvPr/>
-        </p:nvSpPr>
-        <p:spPr>
-          <a:xfrm>
-            <a:off x="957262" y="4426089"/>
-            <a:ext cx="2952750" cy="553998"/>
-          </a:xfrm>
-          <a:prstGeom prst="rect">
-            <a:avLst/>
-          </a:prstGeom>
-          <a:noFill/>
-          <a:ln>
-            <a:noFill/>
-          </a:ln>
-        </p:spPr>
-        <p:txBody>
-          <a:bodyPr spcFirstLastPara="1" wrap="square" lIns="0" tIns="0" rIns="0" bIns="0" anchor="t" anchorCtr="0">
-            <a:spAutoFit/>
-          </a:bodyPr>
-          <a:lstStyle/>
-          <a:p>
-            <a:pPr marL="0" marR="0" lvl="0" indent="0" algn="ctr" rtl="0">
-              <a:spcBef>
-                <a:spcPts val="0"/>
-              </a:spcBef>
-              <a:spcAft>
-                <a:spcPts val="0"/>
-              </a:spcAft>
-              <a:buNone/>
-            </a:pPr>
-            <a:r>
-              <a:rPr lang="en-US" sz="1800" b="0" i="0" u="none" strike="noStrike" cap="none" dirty="0" err="1">
-                <a:solidFill>
-                  <a:srgbClr val="FFFFFF"/>
-                </a:solidFill>
-                <a:latin typeface="DM Sans"/>
-                <a:ea typeface="DM Sans"/>
-                <a:cs typeface="DM Sans"/>
-                <a:sym typeface="DM Sans"/>
-              </a:rPr>
-              <a:t>不同市場與不同時段，最佳模型各異</a:t>
-            </a:r>
-            <a:r>
-              <a:rPr lang="en-US" sz="1800" b="0" i="0" u="none" strike="noStrike" cap="none" dirty="0">
-                <a:solidFill>
-                  <a:srgbClr val="FFFFFF"/>
-                </a:solidFill>
-                <a:latin typeface="DM Sans"/>
-                <a:ea typeface="DM Sans"/>
-                <a:cs typeface="DM Sans"/>
-                <a:sym typeface="DM Sans"/>
-              </a:rPr>
-              <a:t>。</a:t>
-            </a:r>
-            <a:endParaRPr sz="1800" dirty="0"/>
-          </a:p>
-        </p:txBody>
-      </p:sp>
-      <p:pic>
-        <p:nvPicPr>
-          <p:cNvPr id="396" name="Google Shape;396;p31" descr="image.png"/>
-          <p:cNvPicPr preferRelativeResize="0"/>
-          <p:nvPr/>
-        </p:nvPicPr>
-        <p:blipFill rotWithShape="1">
-          <a:blip r:embed="rId6">
-            <a:alphaModFix/>
-          </a:blip>
-          <a:srcRect/>
-          <a:stretch/>
-        </p:blipFill>
-        <p:spPr>
-          <a:xfrm>
-            <a:off x="5857875" y="3194090"/>
-            <a:ext cx="476250" cy="381000"/>
-          </a:xfrm>
-          <a:prstGeom prst="rect">
-            <a:avLst/>
-          </a:prstGeom>
-          <a:noFill/>
-          <a:ln>
-            <a:noFill/>
-          </a:ln>
-        </p:spPr>
-      </p:pic>
-      <p:sp>
-        <p:nvSpPr>
-          <p:cNvPr id="397" name="Google Shape;397;p31"/>
-          <p:cNvSpPr txBox="1"/>
-          <p:nvPr/>
-        </p:nvSpPr>
-        <p:spPr>
-          <a:xfrm>
-            <a:off x="4572000" y="3846098"/>
-            <a:ext cx="3100387" cy="307777"/>
-          </a:xfrm>
-          <a:prstGeom prst="rect">
-            <a:avLst/>
-          </a:prstGeom>
-          <a:noFill/>
-          <a:ln>
-            <a:noFill/>
-          </a:ln>
-        </p:spPr>
-        <p:txBody>
-          <a:bodyPr spcFirstLastPara="1" wrap="square" lIns="0" tIns="0" rIns="0" bIns="0" anchor="t" anchorCtr="0">
-            <a:spAutoFit/>
-          </a:bodyPr>
-          <a:lstStyle/>
-          <a:p>
-            <a:pPr marL="0" marR="0" lvl="0" indent="0" algn="ctr" rtl="0">
-              <a:spcBef>
-                <a:spcPts val="0"/>
-              </a:spcBef>
-              <a:spcAft>
-                <a:spcPts val="0"/>
-              </a:spcAft>
-              <a:buNone/>
-            </a:pPr>
-            <a:r>
-              <a:rPr lang="zh-TW" altLang="en-US" sz="2000" b="1" i="0" u="none" strike="noStrike" cap="none" dirty="0">
-                <a:solidFill>
-                  <a:srgbClr val="FFFFFF"/>
-                </a:solidFill>
-                <a:latin typeface="DM Sans"/>
-                <a:ea typeface="DM Sans"/>
-                <a:cs typeface="DM Sans"/>
-                <a:sym typeface="DM Sans"/>
-              </a:rPr>
-              <a:t>價格 </a:t>
-            </a:r>
-            <a:r>
-              <a:rPr lang="en-US" sz="2000" b="1" i="0" u="none" strike="noStrike" cap="none" dirty="0">
-                <a:solidFill>
-                  <a:srgbClr val="FFFFFF"/>
-                </a:solidFill>
-                <a:latin typeface="DM Sans"/>
-                <a:ea typeface="DM Sans"/>
-                <a:cs typeface="DM Sans"/>
-                <a:sym typeface="DM Sans"/>
-              </a:rPr>
-              <a:t>R² </a:t>
-            </a:r>
-            <a:r>
-              <a:rPr lang="zh-TW" altLang="en-US" sz="2000" b="1" i="0" u="none" strike="noStrike" cap="none" dirty="0">
-                <a:solidFill>
-                  <a:srgbClr val="FFFFFF"/>
-                </a:solidFill>
-                <a:latin typeface="DM Sans"/>
-                <a:ea typeface="DM Sans"/>
-                <a:cs typeface="DM Sans"/>
-                <a:sym typeface="DM Sans"/>
-              </a:rPr>
-              <a:t>高但輸基準</a:t>
-            </a:r>
-            <a:endParaRPr lang="en-US" altLang="zh-TW" sz="2000" b="1" i="0" u="none" strike="noStrike" cap="none" dirty="0">
+            <a:pPr lvl="0"/>
+            <a:r>
+              <a:rPr lang="zh-TW" altLang="zh-TW" sz="2000" b="1" dirty="0">
+                <a:solidFill>
+                  <a:srgbClr val="FFC000"/>
+                </a:solidFill>
+              </a:rPr>
+              <a:t>三大關鍵發現 </a:t>
+            </a:r>
+            <a:endParaRPr lang="en-US" altLang="zh-TW" sz="2000" b="1" dirty="0">
               <a:solidFill>
-                <a:srgbClr val="FFFFFF"/>
+                <a:srgbClr val="FFC000"/>
               </a:solidFill>
-              <a:latin typeface="DM Sans"/>
-              <a:ea typeface="DM Sans"/>
-              <a:cs typeface="DM Sans"/>
-              <a:sym typeface="DM Sans"/>
             </a:endParaRPr>
           </a:p>
-        </p:txBody>
-      </p:sp>
-      <p:sp>
-        <p:nvSpPr>
-          <p:cNvPr id="398" name="Google Shape;398;p31"/>
-          <p:cNvSpPr txBox="1"/>
-          <p:nvPr/>
-        </p:nvSpPr>
-        <p:spPr>
-          <a:xfrm>
-            <a:off x="4719637" y="4426089"/>
-            <a:ext cx="2952750" cy="553998"/>
-          </a:xfrm>
-          <a:prstGeom prst="rect">
-            <a:avLst/>
-          </a:prstGeom>
-          <a:noFill/>
-          <a:ln>
-            <a:noFill/>
-          </a:ln>
-        </p:spPr>
-        <p:txBody>
-          <a:bodyPr spcFirstLastPara="1" wrap="square" lIns="0" tIns="0" rIns="0" bIns="0" anchor="t" anchorCtr="0">
-            <a:spAutoFit/>
-          </a:bodyPr>
-          <a:lstStyle/>
-          <a:p>
-            <a:pPr marL="0" marR="0" lvl="0" indent="0" algn="ctr" rtl="0">
-              <a:spcBef>
-                <a:spcPts val="0"/>
-              </a:spcBef>
-              <a:spcAft>
-                <a:spcPts val="0"/>
-              </a:spcAft>
-              <a:buNone/>
-            </a:pPr>
-            <a:r>
-              <a:rPr lang="zh-TW" altLang="en-US" sz="1800" b="0" i="0" u="none" strike="noStrike" cap="none" dirty="0">
-                <a:solidFill>
-                  <a:srgbClr val="FFFFFF"/>
-                </a:solidFill>
-                <a:latin typeface="DM Sans"/>
-                <a:ea typeface="DM Sans"/>
-                <a:cs typeface="DM Sans"/>
-                <a:sym typeface="DM Sans"/>
-              </a:rPr>
-              <a:t>次日走勢難預測，故分類與 </a:t>
-            </a:r>
-            <a:r>
-              <a:rPr lang="en-US" altLang="zh-TW" sz="1800" b="0" i="0" u="none" strike="noStrike" cap="none" dirty="0">
-                <a:solidFill>
-                  <a:srgbClr val="FFFFFF"/>
-                </a:solidFill>
-                <a:latin typeface="DM Sans"/>
-                <a:ea typeface="DM Sans"/>
-                <a:cs typeface="DM Sans"/>
-                <a:sym typeface="DM Sans"/>
-              </a:rPr>
-              <a:t>LLM </a:t>
-            </a:r>
-            <a:r>
-              <a:rPr lang="zh-TW" altLang="en-US" sz="1800" b="0" i="0" u="none" strike="noStrike" cap="none" dirty="0">
-                <a:solidFill>
-                  <a:srgbClr val="FFFFFF"/>
-                </a:solidFill>
-                <a:latin typeface="DM Sans"/>
-                <a:ea typeface="DM Sans"/>
-                <a:cs typeface="DM Sans"/>
-                <a:sym typeface="DM Sans"/>
-              </a:rPr>
-              <a:t>為輔助</a:t>
-            </a:r>
-            <a:endParaRPr sz="1800" dirty="0"/>
-          </a:p>
-        </p:txBody>
-      </p:sp>
-      <p:pic>
-        <p:nvPicPr>
-          <p:cNvPr id="399" name="Google Shape;399;p31" descr="image.png"/>
-          <p:cNvPicPr preferRelativeResize="0"/>
-          <p:nvPr/>
-        </p:nvPicPr>
-        <p:blipFill rotWithShape="1">
-          <a:blip r:embed="rId7">
-            <a:alphaModFix/>
-          </a:blip>
-          <a:srcRect/>
-          <a:stretch/>
-        </p:blipFill>
-        <p:spPr>
-          <a:xfrm>
-            <a:off x="9555956" y="3199269"/>
-            <a:ext cx="476250" cy="381000"/>
-          </a:xfrm>
-          <a:prstGeom prst="rect">
-            <a:avLst/>
-          </a:prstGeom>
-          <a:noFill/>
-          <a:ln>
-            <a:noFill/>
-          </a:ln>
-        </p:spPr>
-      </p:pic>
-      <p:sp>
-        <p:nvSpPr>
-          <p:cNvPr id="400" name="Google Shape;400;p31"/>
-          <p:cNvSpPr txBox="1"/>
-          <p:nvPr/>
-        </p:nvSpPr>
-        <p:spPr>
-          <a:xfrm>
-            <a:off x="8270081" y="3890029"/>
-            <a:ext cx="3100387" cy="369332"/>
-          </a:xfrm>
-          <a:prstGeom prst="rect">
-            <a:avLst/>
-          </a:prstGeom>
-          <a:noFill/>
-          <a:ln>
-            <a:noFill/>
-          </a:ln>
-        </p:spPr>
-        <p:txBody>
-          <a:bodyPr spcFirstLastPara="1" wrap="square" lIns="0" tIns="0" rIns="0" bIns="0" anchor="t" anchorCtr="0">
-            <a:spAutoFit/>
-          </a:bodyPr>
-          <a:lstStyle/>
-          <a:p>
-            <a:pPr marL="0" marR="0" lvl="0" indent="0" algn="ctr" rtl="0">
-              <a:spcBef>
-                <a:spcPts val="0"/>
-              </a:spcBef>
-              <a:spcAft>
-                <a:spcPts val="0"/>
-              </a:spcAft>
-              <a:buNone/>
-            </a:pPr>
-            <a:r>
-              <a:rPr lang="en-US" sz="2400" b="1" i="0" u="none" strike="noStrike" cap="none">
-                <a:solidFill>
-                  <a:srgbClr val="FFFFFF"/>
-                </a:solidFill>
-                <a:latin typeface="DM Sans"/>
-                <a:ea typeface="DM Sans"/>
-                <a:cs typeface="DM Sans"/>
-                <a:sym typeface="DM Sans"/>
-              </a:rPr>
-              <a:t>LLM 定位</a:t>
-            </a:r>
-            <a:endParaRPr sz="2400"/>
-          </a:p>
-        </p:txBody>
-      </p:sp>
-      <p:sp>
-        <p:nvSpPr>
-          <p:cNvPr id="401" name="Google Shape;401;p31"/>
-          <p:cNvSpPr txBox="1"/>
-          <p:nvPr/>
-        </p:nvSpPr>
-        <p:spPr>
-          <a:xfrm>
-            <a:off x="8417718" y="4431268"/>
-            <a:ext cx="2952750" cy="553998"/>
-          </a:xfrm>
-          <a:prstGeom prst="rect">
-            <a:avLst/>
-          </a:prstGeom>
-          <a:noFill/>
-          <a:ln>
-            <a:noFill/>
-          </a:ln>
-        </p:spPr>
-        <p:txBody>
-          <a:bodyPr spcFirstLastPara="1" wrap="square" lIns="0" tIns="0" rIns="0" bIns="0" anchor="t" anchorCtr="0">
-            <a:spAutoFit/>
-          </a:bodyPr>
-          <a:lstStyle/>
-          <a:p>
-            <a:pPr marL="0" marR="0" lvl="0" indent="0" algn="ctr" rtl="0">
-              <a:spcBef>
-                <a:spcPts val="0"/>
-              </a:spcBef>
-              <a:spcAft>
-                <a:spcPts val="0"/>
-              </a:spcAft>
-              <a:buNone/>
-            </a:pPr>
-            <a:r>
-              <a:rPr lang="en-US" sz="1800" b="0" i="0" u="none" strike="noStrike" cap="none" dirty="0" err="1">
-                <a:solidFill>
-                  <a:srgbClr val="FFFFFF"/>
-                </a:solidFill>
-                <a:latin typeface="DM Sans"/>
-                <a:ea typeface="DM Sans"/>
-                <a:cs typeface="DM Sans"/>
-                <a:sym typeface="DM Sans"/>
-              </a:rPr>
-              <a:t>適合作為「解釋型」輔助，而非純算力引擎</a:t>
-            </a:r>
-            <a:r>
-              <a:rPr lang="en-US" sz="1800" b="0" i="0" u="none" strike="noStrike" cap="none" dirty="0">
-                <a:solidFill>
-                  <a:srgbClr val="FFFFFF"/>
-                </a:solidFill>
-                <a:latin typeface="DM Sans"/>
-                <a:ea typeface="DM Sans"/>
-                <a:cs typeface="DM Sans"/>
-                <a:sym typeface="DM Sans"/>
-              </a:rPr>
-              <a:t>。</a:t>
-            </a:r>
-            <a:endParaRPr sz="1800" dirty="0"/>
-          </a:p>
-        </p:txBody>
-      </p:sp>
-      <p:sp>
-        <p:nvSpPr>
-          <p:cNvPr id="402" name="Google Shape;402;p31"/>
-          <p:cNvSpPr txBox="1"/>
-          <p:nvPr/>
-        </p:nvSpPr>
-        <p:spPr>
-          <a:xfrm>
-            <a:off x="809625" y="919311"/>
-            <a:ext cx="11351418" cy="609398"/>
-          </a:xfrm>
-          <a:prstGeom prst="rect">
-            <a:avLst/>
-          </a:prstGeom>
-          <a:noFill/>
-          <a:ln>
-            <a:noFill/>
-          </a:ln>
-        </p:spPr>
-        <p:txBody>
-          <a:bodyPr spcFirstLastPara="1" wrap="square" lIns="0" tIns="0" rIns="0" bIns="0" anchor="t" anchorCtr="0">
-            <a:spAutoFit/>
-          </a:bodyPr>
-          <a:lstStyle/>
-          <a:p>
-            <a:pPr lvl="0">
-              <a:lnSpc>
-                <a:spcPct val="119969"/>
-              </a:lnSpc>
-            </a:pPr>
-            <a:r>
-              <a:rPr lang="zh-TW" altLang="en-US" sz="3300" b="1" dirty="0">
-                <a:solidFill>
-                  <a:srgbClr val="002147"/>
-                </a:solidFill>
-                <a:latin typeface="Merriweather"/>
-                <a:ea typeface="Merriweather"/>
-                <a:cs typeface="Merriweather"/>
-                <a:sym typeface="Merriweather"/>
-              </a:rPr>
-              <a:t>結論</a:t>
-            </a:r>
-            <a:r>
-              <a:rPr lang="en-US" sz="3300" b="1" i="0" u="none" strike="noStrike" cap="none" dirty="0">
-                <a:solidFill>
-                  <a:srgbClr val="002147"/>
-                </a:solidFill>
-                <a:latin typeface="Merriweather"/>
-                <a:ea typeface="Merriweather"/>
-                <a:cs typeface="Merriweather"/>
-                <a:sym typeface="Merriweather"/>
-              </a:rPr>
-              <a:t>：</a:t>
-            </a:r>
-            <a:r>
-              <a:rPr lang="en-US" sz="3300" b="1" i="0" u="none" strike="noStrike" cap="none" dirty="0" err="1">
-                <a:solidFill>
-                  <a:srgbClr val="002147"/>
-                </a:solidFill>
-                <a:latin typeface="Merriweather"/>
-                <a:ea typeface="Merriweather"/>
-                <a:cs typeface="Merriweather"/>
-                <a:sym typeface="Merriweather"/>
-              </a:rPr>
-              <a:t>模型比較關鍵發現</a:t>
-            </a:r>
-            <a:endParaRPr dirty="0"/>
-          </a:p>
-        </p:txBody>
-      </p:sp>
-      <p:sp>
-        <p:nvSpPr>
-          <p:cNvPr id="403" name="Google Shape;403;p31"/>
-          <p:cNvSpPr/>
-          <p:nvPr/>
-        </p:nvSpPr>
-        <p:spPr>
-          <a:xfrm>
-            <a:off x="571500" y="919311"/>
-            <a:ext cx="76200" cy="502890"/>
-          </a:xfrm>
-          <a:prstGeom prst="rect">
-            <a:avLst/>
-          </a:prstGeom>
-          <a:solidFill>
-            <a:srgbClr val="D4AF37"/>
-          </a:solidFill>
-          <a:ln>
-            <a:noFill/>
-          </a:ln>
-        </p:spPr>
-        <p:txBody>
-          <a:bodyPr spcFirstLastPara="1" wrap="square" lIns="91425" tIns="45700" rIns="91425" bIns="45700" anchor="ctr" anchorCtr="0">
-            <a:noAutofit/>
-          </a:bodyPr>
-          <a:lstStyle/>
-          <a:p>
-            <a:pPr marL="0" marR="0" lvl="0" indent="0" algn="ctr" rtl="0">
-              <a:spcBef>
-                <a:spcPts val="0"/>
-              </a:spcBef>
-              <a:spcAft>
-                <a:spcPts val="0"/>
-              </a:spcAft>
-              <a:buNone/>
-            </a:pPr>
-            <a:endParaRPr sz="1800" b="0" i="0" u="none" strike="noStrike" cap="none">
+          <a:p>
+            <a:pPr lvl="0"/>
+            <a:r>
+              <a:rPr lang="zh-TW" altLang="zh-TW" sz="1800" dirty="0">
+                <a:solidFill>
+                  <a:schemeClr val="bg1"/>
+                </a:solidFill>
+              </a:rPr>
+              <a:t>無單一冠軍：不同市場、不同任務，最佳模型各異 </a:t>
+            </a:r>
+            <a:endParaRPr lang="en-US" altLang="zh-TW" sz="1800" dirty="0">
               <a:solidFill>
-                <a:schemeClr val="dk1"/>
+                <a:schemeClr val="bg1"/>
               </a:solidFill>
-              <a:latin typeface="Calibri"/>
-              <a:ea typeface="Calibri"/>
-              <a:cs typeface="Calibri"/>
-              <a:sym typeface="Calibri"/>
+            </a:endParaRPr>
+          </a:p>
+          <a:p>
+            <a:pPr lvl="0"/>
+            <a:r>
+              <a:rPr lang="zh-TW" altLang="zh-TW" sz="1800" dirty="0">
+                <a:solidFill>
+                  <a:schemeClr val="bg1"/>
+                </a:solidFill>
+              </a:rPr>
+              <a:t>價格 R² 高但輸基準：次日走勢難預測，分類與</a:t>
+            </a:r>
+            <a:endParaRPr lang="en-US" altLang="zh-TW" sz="1800" dirty="0">
+              <a:solidFill>
+                <a:schemeClr val="bg1"/>
+              </a:solidFill>
+            </a:endParaRPr>
+          </a:p>
+          <a:p>
+            <a:pPr lvl="0"/>
+            <a:r>
+              <a:rPr lang="zh-TW" altLang="zh-TW" sz="1800" dirty="0">
+                <a:solidFill>
+                  <a:schemeClr val="bg1"/>
+                </a:solidFill>
+              </a:rPr>
+              <a:t> LLM 為輔助 LLM 定位：適合作為「解釋型」輔助，而非純算力引擎</a:t>
+            </a:r>
+            <a:endParaRPr sz="1800" dirty="0">
+              <a:solidFill>
+                <a:schemeClr val="bg1"/>
+              </a:solidFill>
             </a:endParaRPr>
           </a:p>
         </p:txBody>
@@ -32129,7 +31430,7 @@
 </p:sld>
 </file>
 
-<file path=ppt/slides/slide28.xml><?xml version="1.0" encoding="utf-8"?>
+<file path=ppt/slides/slide27.xml><?xml version="1.0" encoding="utf-8"?>
 <p:sld xmlns:a="http://schemas.openxmlformats.org/drawingml/2006/main" xmlns:r="http://schemas.openxmlformats.org/officeDocument/2006/relationships" xmlns:p="http://schemas.openxmlformats.org/presentationml/2006/main">
   <p:cSld>
     <p:bg>
@@ -32169,8 +31470,8 @@
         </p:blipFill>
         <p:spPr>
           <a:xfrm>
-            <a:off x="571500" y="2393156"/>
-            <a:ext cx="5334000" cy="2611981"/>
+            <a:off x="571500" y="2097881"/>
+            <a:ext cx="5334000" cy="3545533"/>
           </a:xfrm>
           <a:prstGeom prst="rect">
             <a:avLst/>
@@ -32196,8 +31497,8 @@
         </p:blipFill>
         <p:spPr>
           <a:xfrm>
-            <a:off x="6286500" y="2393156"/>
-            <a:ext cx="5334000" cy="2611981"/>
+            <a:off x="6286500" y="2097881"/>
+            <a:ext cx="5334000" cy="3545533"/>
           </a:xfrm>
           <a:prstGeom prst="rect">
             <a:avLst/>
@@ -32216,7 +31517,7 @@
         </p:nvSpPr>
         <p:spPr>
           <a:xfrm>
-            <a:off x="295275" y="5202138"/>
+            <a:off x="295275" y="6147619"/>
             <a:ext cx="11601450" cy="369332"/>
           </a:xfrm>
           <a:prstGeom prst="rect">
@@ -32266,7 +31567,7 @@
         </p:nvSpPr>
         <p:spPr>
           <a:xfrm>
-            <a:off x="866775" y="2688431"/>
+            <a:off x="866775" y="2393156"/>
             <a:ext cx="4980622" cy="369332"/>
           </a:xfrm>
           <a:prstGeom prst="rect">
@@ -32316,7 +31617,7 @@
         </p:nvSpPr>
         <p:spPr>
           <a:xfrm>
-            <a:off x="6581775" y="2688431"/>
+            <a:off x="6581775" y="2393156"/>
             <a:ext cx="4980622" cy="369332"/>
           </a:xfrm>
           <a:prstGeom prst="rect">
@@ -32473,8 +31774,8 @@
         </p:nvSpPr>
         <p:spPr>
           <a:xfrm>
-            <a:off x="571500" y="3338573"/>
-            <a:ext cx="5334000" cy="923330"/>
+            <a:off x="571500" y="3043298"/>
+            <a:ext cx="5334000" cy="1374159"/>
           </a:xfrm>
           <a:prstGeom prst="rect">
             <a:avLst/>
@@ -32487,129 +31788,127 @@
           </a:bodyPr>
           <a:lstStyle/>
           <a:p>
-            <a:pPr algn="l">
-              <a:buFont typeface="Arial" panose="020B0604020202020204" pitchFamily="34" charset="0"/>
-              <a:buChar char="•"/>
+            <a:pPr marL="285750" indent="-285750">
+              <a:lnSpc>
+                <a:spcPct val="160000"/>
+              </a:lnSpc>
+              <a:buFontTx/>
+              <a:buChar char="-"/>
             </a:pPr>
             <a:r>
-              <a:rPr lang="zh-TW" altLang="en-US" sz="1800" b="0" i="0" dirty="0">
+              <a:rPr lang="zh-TW" altLang="en-US" sz="1800" dirty="0">
                 <a:solidFill>
                   <a:srgbClr val="1E293B"/>
                 </a:solidFill>
-                <a:effectLst/>
-                <a:latin typeface="DM Sans" pitchFamily="2" charset="0"/>
+                <a:latin typeface="DM Sans"/>
               </a:rPr>
               <a:t>建立跨市場</a:t>
             </a:r>
             <a:r>
-              <a:rPr lang="en-US" altLang="zh-TW" sz="1800" b="0" i="0" dirty="0">
+              <a:rPr lang="en-US" altLang="zh-TW" sz="1800" dirty="0">
                 <a:solidFill>
                   <a:srgbClr val="1E293B"/>
                 </a:solidFill>
-                <a:effectLst/>
-                <a:latin typeface="DM Sans" pitchFamily="2" charset="0"/>
+                <a:latin typeface="DM Sans"/>
               </a:rPr>
               <a:t>(</a:t>
             </a:r>
             <a:r>
-              <a:rPr lang="zh-TW" altLang="en-US" sz="1800" b="0" i="0" dirty="0">
+              <a:rPr lang="zh-TW" altLang="en-US" sz="1800" dirty="0">
                 <a:solidFill>
                   <a:srgbClr val="1E293B"/>
                 </a:solidFill>
-                <a:effectLst/>
-                <a:latin typeface="DM Sans" pitchFamily="2" charset="0"/>
+                <a:latin typeface="DM Sans"/>
               </a:rPr>
               <a:t>台</a:t>
             </a:r>
             <a:r>
-              <a:rPr lang="en-US" altLang="zh-TW" sz="1800" b="0" i="0" dirty="0">
+              <a:rPr lang="en-US" altLang="zh-TW" sz="1800" dirty="0">
                 <a:solidFill>
                   <a:srgbClr val="1E293B"/>
                 </a:solidFill>
-                <a:effectLst/>
-                <a:latin typeface="DM Sans" pitchFamily="2" charset="0"/>
+                <a:latin typeface="DM Sans"/>
               </a:rPr>
               <a:t>/</a:t>
             </a:r>
             <a:r>
-              <a:rPr lang="zh-TW" altLang="en-US" sz="1800" b="0" i="0" dirty="0">
+              <a:rPr lang="zh-TW" altLang="en-US" sz="1800" dirty="0">
                 <a:solidFill>
                   <a:srgbClr val="1E293B"/>
                 </a:solidFill>
-                <a:effectLst/>
-                <a:latin typeface="DM Sans" pitchFamily="2" charset="0"/>
+                <a:latin typeface="DM Sans"/>
               </a:rPr>
               <a:t>美</a:t>
             </a:r>
             <a:r>
-              <a:rPr lang="en-US" altLang="zh-TW" sz="1800" b="0" i="0" dirty="0">
+              <a:rPr lang="en-US" altLang="zh-TW" sz="1800" dirty="0">
                 <a:solidFill>
                   <a:srgbClr val="1E293B"/>
                 </a:solidFill>
-                <a:effectLst/>
-                <a:latin typeface="DM Sans" pitchFamily="2" charset="0"/>
+                <a:latin typeface="DM Sans"/>
               </a:rPr>
               <a:t>)</a:t>
             </a:r>
             <a:r>
-              <a:rPr lang="zh-TW" altLang="en-US" sz="1800" b="0" i="0" dirty="0">
+              <a:rPr lang="zh-TW" altLang="en-US" sz="1800" dirty="0">
                 <a:solidFill>
                   <a:srgbClr val="1E293B"/>
                 </a:solidFill>
-                <a:effectLst/>
-                <a:latin typeface="DM Sans" pitchFamily="2" charset="0"/>
+                <a:latin typeface="DM Sans"/>
               </a:rPr>
               <a:t>預測基準比較。</a:t>
             </a:r>
           </a:p>
           <a:p>
-            <a:pPr algn="l">
-              <a:buFont typeface="Arial" panose="020B0604020202020204" pitchFamily="34" charset="0"/>
-              <a:buChar char="•"/>
+            <a:pPr marL="285750" indent="-285750">
+              <a:lnSpc>
+                <a:spcPct val="160000"/>
+              </a:lnSpc>
+              <a:buFontTx/>
+              <a:buChar char="-"/>
             </a:pPr>
             <a:r>
-              <a:rPr lang="zh-TW" altLang="en-US" sz="1800" b="0" i="0" dirty="0">
+              <a:rPr lang="zh-TW" altLang="en-US" sz="1800" dirty="0">
                 <a:solidFill>
                   <a:srgbClr val="1E293B"/>
                 </a:solidFill>
-                <a:effectLst/>
-                <a:latin typeface="DM Sans" pitchFamily="2" charset="0"/>
+                <a:latin typeface="DM Sans"/>
               </a:rPr>
               <a:t>揭示台股受國際連動影響之預測難點。</a:t>
             </a:r>
           </a:p>
           <a:p>
-            <a:pPr algn="l">
-              <a:buFont typeface="Arial" panose="020B0604020202020204" pitchFamily="34" charset="0"/>
-              <a:buChar char="•"/>
+            <a:pPr marL="285750" indent="-285750">
+              <a:lnSpc>
+                <a:spcPct val="160000"/>
+              </a:lnSpc>
+              <a:buFontTx/>
+              <a:buChar char="-"/>
             </a:pPr>
             <a:r>
-              <a:rPr lang="zh-TW" altLang="en-US" sz="1800" b="0" i="0" dirty="0">
+              <a:rPr lang="zh-TW" altLang="en-US" sz="1800" dirty="0">
                 <a:solidFill>
                   <a:srgbClr val="1E293B"/>
                 </a:solidFill>
-                <a:effectLst/>
-                <a:latin typeface="DM Sans" pitchFamily="2" charset="0"/>
+                <a:latin typeface="DM Sans"/>
               </a:rPr>
               <a:t>實作 </a:t>
             </a:r>
             <a:r>
-              <a:rPr lang="en-US" altLang="zh-TW" sz="1800" b="0" i="0" dirty="0">
+              <a:rPr lang="en-US" altLang="zh-TW" sz="1800" dirty="0">
                 <a:solidFill>
                   <a:srgbClr val="1E293B"/>
                 </a:solidFill>
-                <a:effectLst/>
-                <a:latin typeface="DM Sans" pitchFamily="2" charset="0"/>
+                <a:latin typeface="DM Sans"/>
               </a:rPr>
               <a:t>LLM </a:t>
             </a:r>
             <a:r>
-              <a:rPr lang="zh-TW" altLang="en-US" sz="1800" b="0" i="0" dirty="0">
+              <a:rPr lang="zh-TW" altLang="en-US" sz="1800" dirty="0">
                 <a:solidFill>
                   <a:srgbClr val="1E293B"/>
                 </a:solidFill>
-                <a:effectLst/>
-                <a:latin typeface="DM Sans" pitchFamily="2" charset="0"/>
+                <a:latin typeface="DM Sans"/>
               </a:rPr>
               <a:t>輔助開源平台。</a:t>
             </a:r>
@@ -32630,8 +31929,8 @@
         </p:nvSpPr>
         <p:spPr>
           <a:xfrm>
-            <a:off x="6286500" y="3232443"/>
-            <a:ext cx="5275897" cy="1477328"/>
+            <a:off x="6286500" y="2937168"/>
+            <a:ext cx="5275897" cy="2260555"/>
           </a:xfrm>
           <a:prstGeom prst="rect">
             <a:avLst/>
@@ -32667,53 +31966,112 @@
             </a:lvl1pPr>
           </a:lstStyle>
           <a:p>
-            <a:r>
-              <a:rPr lang="zh-TW" altLang="en-US" dirty="0"/>
+            <a:pPr marL="285750" indent="-285750">
+              <a:lnSpc>
+                <a:spcPct val="160000"/>
+              </a:lnSpc>
+              <a:buFontTx/>
+              <a:buChar char="-"/>
+            </a:pPr>
+            <a:r>
+              <a:rPr lang="zh-TW" altLang="en-US" dirty="0">
+                <a:latin typeface="DM Sans"/>
+              </a:rPr>
               <a:t>導入新聞情緒與總經指標分析。</a:t>
             </a:r>
           </a:p>
           <a:p>
-            <a:r>
-              <a:rPr lang="zh-TW" altLang="en-US" dirty="0"/>
+            <a:pPr marL="285750" indent="-285750">
+              <a:lnSpc>
+                <a:spcPct val="160000"/>
+              </a:lnSpc>
+              <a:buFontTx/>
+              <a:buChar char="-"/>
+            </a:pPr>
+            <a:r>
+              <a:rPr lang="zh-TW" altLang="en-US" dirty="0">
+                <a:latin typeface="DM Sans"/>
+              </a:rPr>
               <a:t>開發 </a:t>
             </a:r>
             <a:r>
-              <a:rPr lang="en-US" altLang="zh-TW" dirty="0"/>
+              <a:rPr lang="en-US" altLang="zh-TW" dirty="0">
+                <a:latin typeface="DM Sans"/>
+              </a:rPr>
               <a:t>LSTM-ARIMA </a:t>
             </a:r>
             <a:r>
-              <a:rPr lang="zh-TW" altLang="en-US" dirty="0"/>
+              <a:rPr lang="zh-TW" altLang="en-US" dirty="0">
+                <a:latin typeface="DM Sans"/>
+              </a:rPr>
               <a:t>混合模型。</a:t>
             </a:r>
           </a:p>
           <a:p>
-            <a:r>
-              <a:rPr lang="zh-TW" altLang="en-US" dirty="0"/>
+            <a:pPr marL="285750" indent="-285750">
+              <a:lnSpc>
+                <a:spcPct val="160000"/>
+              </a:lnSpc>
+              <a:buFontTx/>
+              <a:buChar char="-"/>
+            </a:pPr>
+            <a:r>
+              <a:rPr lang="zh-TW" altLang="en-US" dirty="0">
+                <a:latin typeface="DM Sans"/>
+              </a:rPr>
               <a:t>進行正式使用者 </a:t>
             </a:r>
             <a:r>
-              <a:rPr lang="en-US" altLang="zh-TW" dirty="0"/>
+              <a:rPr lang="en-US" altLang="zh-TW" dirty="0">
+                <a:latin typeface="DM Sans"/>
+              </a:rPr>
               <a:t>SUS </a:t>
             </a:r>
             <a:r>
-              <a:rPr lang="zh-TW" altLang="en-US" dirty="0"/>
+              <a:rPr lang="zh-TW" altLang="en-US" dirty="0">
+                <a:latin typeface="DM Sans"/>
+              </a:rPr>
               <a:t>量表研究。</a:t>
             </a:r>
-            <a:endParaRPr lang="en-US" altLang="zh-TW" dirty="0"/>
-          </a:p>
-          <a:p>
-            <a:r>
-              <a:rPr lang="zh-TW" altLang="zh-TW" dirty="0"/>
+            <a:endParaRPr lang="en-US" altLang="zh-TW" dirty="0">
+              <a:latin typeface="DM Sans"/>
+            </a:endParaRPr>
+          </a:p>
+          <a:p>
+            <a:pPr marL="285750" indent="-285750">
+              <a:lnSpc>
+                <a:spcPct val="160000"/>
+              </a:lnSpc>
+              <a:buFontTx/>
+              <a:buChar char="-"/>
+            </a:pPr>
+            <a:r>
+              <a:rPr lang="zh-TW" altLang="zh-TW" dirty="0">
+                <a:latin typeface="DM Sans"/>
+              </a:rPr>
               <a:t>擴大 LLM 迴歸樣本至完整測試集 </a:t>
             </a:r>
-            <a:endParaRPr lang="en-US" altLang="zh-TW" dirty="0"/>
-          </a:p>
-          <a:p>
-            <a:r>
-              <a:rPr lang="zh-TW" altLang="zh-TW" dirty="0"/>
+            <a:endParaRPr lang="en-US" altLang="zh-TW" dirty="0">
+              <a:latin typeface="DM Sans"/>
+            </a:endParaRPr>
+          </a:p>
+          <a:p>
+            <a:pPr marL="285750" indent="-285750">
+              <a:lnSpc>
+                <a:spcPct val="160000"/>
+              </a:lnSpc>
+              <a:buFontTx/>
+              <a:buChar char="-"/>
+            </a:pPr>
+            <a:r>
+              <a:rPr lang="zh-TW" altLang="zh-TW" dirty="0">
+                <a:latin typeface="DM Sans"/>
+              </a:rPr>
               <a:t>比較多種 LLM（Gemini、Llama、Gemma）</a:t>
             </a:r>
-            <a:endParaRPr lang="zh-TW" altLang="en-US" dirty="0"/>
+            <a:endParaRPr lang="zh-TW" altLang="en-US" dirty="0">
+              <a:latin typeface="DM Sans"/>
+            </a:endParaRPr>
           </a:p>
         </p:txBody>
       </p:sp>
